--- a/public/exports/ws1-google-slides-design-plugin-deck.pptx
+++ b/public/exports/ws1-google-slides-design-plugin-deck.pptx
@@ -6574,7 +6574,7 @@
                 <a:ea typeface="Roboto" pitchFamily="34" charset="-122"/>
                 <a:cs typeface="Roboto" pitchFamily="34" charset="-120"/>
               </a:rPr>
-              <a:t>Claude 3.7 or Private GKE</a:t>
+              <a:t>Private GKE or PT Endpoint</a:t>
             </a:r>
             <a:endParaRPr lang="en-US" sz="480" dirty="0"/>
           </a:p>
